--- a/3-Master_Plan/re_entry/HEROs_and_PASSes/slides/auto/CHAR_rho_characterization_AUTO.pptx
+++ b/3-Master_Plan/re_entry/HEROs_and_PASSes/slides/auto/CHAR_rho_characterization_AUTO.pptx
@@ -3140,7 +3140,7 @@
         <p:spPr>
           <a:xfrm>
             <a:off x="411480" y="768096"/>
-            <a:ext cx="4160520" cy="3895344"/>
+            <a:ext cx="4160520" cy="3511296"/>
           </a:xfrm>
           <a:prstGeom prst="rect">
             <a:avLst/>
@@ -3205,7 +3205,7 @@
               <a:rPr sz="1000">
                 <a:latin typeface="Courier New"/>
               </a:rPr>
-              <a:t>\pi_{ij} \propto \exp\left(-\rho \cdot \frac{(A_i-T_j)^2}{2\sigma^2}\right)</a:t>
+              <a:t>\pi_{ij} \propto \exp\left(-\rho \cdot \frac{(A_i-T_{j^*})^2}{2\sigma^2}\right)</a:t>
             </a:r>
           </a:p>
           <a:p>
@@ -3381,8 +3381,8 @@
         </p:blipFill>
         <p:spPr>
           <a:xfrm>
-            <a:off x="5273272" y="768096"/>
-            <a:ext cx="6006838" cy="3895344"/>
+            <a:off x="5690246" y="768096"/>
+            <a:ext cx="5172890" cy="3511296"/>
           </a:xfrm>
           <a:prstGeom prst="rect">
             <a:avLst/>
@@ -3397,7 +3397,7 @@
         </p:nvSpPr>
         <p:spPr>
           <a:xfrm>
-            <a:off x="411480" y="4681728"/>
+            <a:off x="411480" y="4297680"/>
             <a:ext cx="11368735" cy="1234440"/>
           </a:xfrm>
           <a:prstGeom prst="rect">
@@ -3449,7 +3449,7 @@
               <a:rPr sz="800" i="1" baseline="-25000">
                 <a:latin typeface="Cambria Math"/>
               </a:rPr>
-              <a:t>j</a:t>
+              <a:t>j^*</a:t>
             </a:r>
             <a:r>
               <a:rPr sz="900"/>
@@ -3543,6 +3543,114 @@
       <p:sp>
         <p:nvSpPr>
           <p:cNvPr id="6" name="TextBox 5"/>
+          <p:cNvSpPr txBox="1"/>
+          <p:nvPr/>
+        </p:nvSpPr>
+        <p:spPr>
+          <a:xfrm>
+            <a:off x="411480" y="5586984"/>
+            <a:ext cx="11368735" cy="347472"/>
+          </a:xfrm>
+          <a:prstGeom prst="rect">
+            <a:avLst/>
+          </a:prstGeom>
+          <a:noFill/>
+        </p:spPr>
+        <p:txBody>
+          <a:bodyPr wrap="none">
+            <a:spAutoFit/>
+          </a:bodyPr>
+          <a:lstStyle/>
+          <a:p>
+            <a:pPr algn="l"/>
+            <a:r>
+              <a:rPr sz="1000"/>
+              <a:t>Why </a:t>
+            </a:r>
+            <a:r>
+              <a:rPr sz="1000" i="1">
+                <a:latin typeface="Cambria Math"/>
+              </a:rPr>
+              <a:t>ρ</a:t>
+            </a:r>
+            <a:r>
+              <a:rPr sz="1000"/>
+              <a:t> matters here: assignment assortativity sets how spread out team </a:t>
+            </a:r>
+            <a:r>
+              <a:rPr sz="1000" i="1">
+                <a:latin typeface="Cambria Math"/>
+              </a:rPr>
+              <a:t>L</a:t>
+            </a:r>
+            <a:r>
+              <a:rPr sz="800" i="1" baseline="-25000">
+                <a:latin typeface="Cambria Math"/>
+              </a:rPr>
+              <a:t>C</a:t>
+            </a:r>
+            <a:r>
+              <a:rPr sz="1000"/>
+              <a:t> is across the league — at </a:t>
+            </a:r>
+            <a:r>
+              <a:rPr sz="1000" i="1">
+                <a:latin typeface="Cambria Math"/>
+              </a:rPr>
+              <a:t>ρ ≈ 0</a:t>
+            </a:r>
+            <a:r>
+              <a:rPr sz="1000"/>
+              <a:t> (arm </a:t>
+            </a:r>
+            <a:r>
+              <a:rPr sz="1000" i="1">
+                <a:latin typeface="Cambria Math"/>
+              </a:rPr>
+              <a:t>0.001</a:t>
+            </a:r>
+            <a:r>
+              <a:rPr sz="1000"/>
+              <a:t>) rosters mix and peer pressure looks the same everywhere; at high </a:t>
+            </a:r>
+            <a:r>
+              <a:rPr sz="1000" i="1">
+                <a:latin typeface="Cambria Math"/>
+              </a:rPr>
+              <a:t>ρ</a:t>
+            </a:r>
+            <a:r>
+              <a:rPr sz="1000"/>
+              <a:t> weak teams pile up near </a:t>
+            </a:r>
+            <a:r>
+              <a:rPr sz="1000" i="1">
+                <a:latin typeface="Cambria Math"/>
+              </a:rPr>
+              <a:t>L</a:t>
+            </a:r>
+            <a:r>
+              <a:rPr sz="800" i="1" baseline="-25000">
+                <a:latin typeface="Cambria Math"/>
+              </a:rPr>
+              <a:t>C</a:t>
+            </a:r>
+            <a:r>
+              <a:rPr sz="1000" i="1">
+                <a:latin typeface="Cambria Math"/>
+              </a:rPr>
+              <a:t> ≈ 0</a:t>
+            </a:r>
+            <a:r>
+              <a:rPr sz="1000"/>
+              <a:t> while elite rosters face real congestion.</a:t>
+            </a:r>
+          </a:p>
+        </p:txBody>
+      </p:sp>
+      <p:sp>
+        <p:nvSpPr>
+          <p:cNvPr id="7" name="TextBox 6"/>
           <p:cNvSpPr txBox="1"/>
           <p:nvPr/>
         </p:nvSpPr>
@@ -3691,7 +3799,7 @@
         <p:spPr>
           <a:xfrm>
             <a:off x="411480" y="768096"/>
-            <a:ext cx="4160520" cy="3895344"/>
+            <a:ext cx="4160520" cy="3511296"/>
           </a:xfrm>
           <a:prstGeom prst="rect">
             <a:avLst/>
@@ -3756,7 +3864,7 @@
               <a:rPr sz="1000">
                 <a:latin typeface="Courier New"/>
               </a:rPr>
-              <a:t>\pi_{ij} \propto \exp\left(-\rho \cdot \frac{(A_i-T_j)^2}{2\sigma^2}\right)</a:t>
+              <a:t>\pi_{ij} \propto \exp\left(-\rho \cdot \frac{(A_i-T_{j^*})^2}{2\sigma^2}\right)</a:t>
             </a:r>
           </a:p>
           <a:p>
@@ -3928,8 +4036,8 @@
         </p:blipFill>
         <p:spPr>
           <a:xfrm>
-            <a:off x="5239467" y="768096"/>
-            <a:ext cx="6074448" cy="3895344"/>
+            <a:off x="5658895" y="768096"/>
+            <a:ext cx="5235593" cy="3511296"/>
           </a:xfrm>
           <a:prstGeom prst="rect">
             <a:avLst/>
@@ -3944,7 +4052,7 @@
         </p:nvSpPr>
         <p:spPr>
           <a:xfrm>
-            <a:off x="411480" y="4681728"/>
+            <a:off x="411480" y="4297680"/>
             <a:ext cx="11368735" cy="1234440"/>
           </a:xfrm>
           <a:prstGeom prst="rect">
@@ -3996,7 +4104,7 @@
               <a:rPr sz="800" i="1" baseline="-25000">
                 <a:latin typeface="Cambria Math"/>
               </a:rPr>
-              <a:t>j</a:t>
+              <a:t>j^*</a:t>
             </a:r>
             <a:r>
               <a:rPr sz="900"/>
@@ -4090,6 +4198,114 @@
       <p:sp>
         <p:nvSpPr>
           <p:cNvPr id="6" name="TextBox 5"/>
+          <p:cNvSpPr txBox="1"/>
+          <p:nvPr/>
+        </p:nvSpPr>
+        <p:spPr>
+          <a:xfrm>
+            <a:off x="411480" y="5586984"/>
+            <a:ext cx="11368735" cy="347472"/>
+          </a:xfrm>
+          <a:prstGeom prst="rect">
+            <a:avLst/>
+          </a:prstGeom>
+          <a:noFill/>
+        </p:spPr>
+        <p:txBody>
+          <a:bodyPr wrap="none">
+            <a:spAutoFit/>
+          </a:bodyPr>
+          <a:lstStyle/>
+          <a:p>
+            <a:pPr algn="l"/>
+            <a:r>
+              <a:rPr sz="1000"/>
+              <a:t>Why </a:t>
+            </a:r>
+            <a:r>
+              <a:rPr sz="1000" i="1">
+                <a:latin typeface="Cambria Math"/>
+              </a:rPr>
+              <a:t>ρ</a:t>
+            </a:r>
+            <a:r>
+              <a:rPr sz="1000"/>
+              <a:t> matters here: assignment assortativity sets how spread out team </a:t>
+            </a:r>
+            <a:r>
+              <a:rPr sz="1000" i="1">
+                <a:latin typeface="Cambria Math"/>
+              </a:rPr>
+              <a:t>L</a:t>
+            </a:r>
+            <a:r>
+              <a:rPr sz="800" i="1" baseline="-25000">
+                <a:latin typeface="Cambria Math"/>
+              </a:rPr>
+              <a:t>C</a:t>
+            </a:r>
+            <a:r>
+              <a:rPr sz="1000"/>
+              <a:t> is across the league — at </a:t>
+            </a:r>
+            <a:r>
+              <a:rPr sz="1000" i="1">
+                <a:latin typeface="Cambria Math"/>
+              </a:rPr>
+              <a:t>ρ ≈ 0</a:t>
+            </a:r>
+            <a:r>
+              <a:rPr sz="1000"/>
+              <a:t> (arm </a:t>
+            </a:r>
+            <a:r>
+              <a:rPr sz="1000" i="1">
+                <a:latin typeface="Cambria Math"/>
+              </a:rPr>
+              <a:t>0.001</a:t>
+            </a:r>
+            <a:r>
+              <a:rPr sz="1000"/>
+              <a:t>) rosters mix and peer pressure looks the same everywhere; at high </a:t>
+            </a:r>
+            <a:r>
+              <a:rPr sz="1000" i="1">
+                <a:latin typeface="Cambria Math"/>
+              </a:rPr>
+              <a:t>ρ</a:t>
+            </a:r>
+            <a:r>
+              <a:rPr sz="1000"/>
+              <a:t> weak teams pile up near </a:t>
+            </a:r>
+            <a:r>
+              <a:rPr sz="1000" i="1">
+                <a:latin typeface="Cambria Math"/>
+              </a:rPr>
+              <a:t>L</a:t>
+            </a:r>
+            <a:r>
+              <a:rPr sz="800" i="1" baseline="-25000">
+                <a:latin typeface="Cambria Math"/>
+              </a:rPr>
+              <a:t>C</a:t>
+            </a:r>
+            <a:r>
+              <a:rPr sz="1000" i="1">
+                <a:latin typeface="Cambria Math"/>
+              </a:rPr>
+              <a:t> ≈ 0</a:t>
+            </a:r>
+            <a:r>
+              <a:rPr sz="1000"/>
+              <a:t> while elite rosters face real congestion.</a:t>
+            </a:r>
+          </a:p>
+        </p:txBody>
+      </p:sp>
+      <p:sp>
+        <p:nvSpPr>
+          <p:cNvPr id="7" name="TextBox 6"/>
           <p:cNvSpPr txBox="1"/>
           <p:nvPr/>
         </p:nvSpPr>

--- a/3-Master_Plan/re_entry/HEROs_and_PASSes/slides/auto/CHAR_rho_characterization_AUTO.pptx
+++ b/3-Master_Plan/re_entry/HEROs_and_PASSes/slides/auto/CHAR_rho_characterization_AUTO.pptx
@@ -3203,7 +3203,7 @@
             </a:pPr>
             <a:r>
               <a:rPr sz="1000">
-                <a:latin typeface="Courier New"/>
+                <a:latin typeface="Calibri"/>
               </a:rPr>
               <a:t>\pi_{ij} \propto \exp\left(-\rho \cdot \frac{(A_i-T_{j^*})^2}{2\sigma^2}\right)</a:t>
             </a:r>
@@ -3239,7 +3239,7 @@
               <a:rPr sz="1000" i="1">
                 <a:latin typeface="Cambria Math"/>
               </a:rPr>
-              <a:t>ρ ∈ {0.1, 1, 8, 32}</a:t>
+              <a:t>ρ ∈ {0.001, 1, 8, 32}</a:t>
             </a:r>
             <a:r>
               <a:rPr sz="1000"/>
@@ -3381,8 +3381,8 @@
         </p:blipFill>
         <p:spPr>
           <a:xfrm>
-            <a:off x="5690246" y="768096"/>
-            <a:ext cx="5172890" cy="3511296"/>
+            <a:off x="5662376" y="768096"/>
+            <a:ext cx="5228631" cy="3511296"/>
           </a:xfrm>
           <a:prstGeom prst="rect">
             <a:avLst/>
@@ -3487,7 +3487,33 @@
             </a:r>
             <a:r>
               <a:rPr sz="900"/>
-              <a:t>: players mix across teams — selection vs pool mean stays nearly flat.</a:t>
+              <a:t>: rosters mix — </a:t>
+            </a:r>
+            <a:r>
+              <a:rPr sz="900" i="1">
+                <a:latin typeface="Cambria Math"/>
+              </a:rPr>
+              <a:t>L</a:t>
+            </a:r>
+            <a:r>
+              <a:rPr sz="800" i="1" baseline="-25000">
+                <a:latin typeface="Cambria Math"/>
+              </a:rPr>
+              <a:t>C</a:t>
+            </a:r>
+            <a:r>
+              <a:rPr sz="900"/>
+              <a:t> nearly uniform; curve tilts up weakly (no inverted-</a:t>
+            </a:r>
+            <a:r>
+              <a:rPr sz="900" i="1">
+                <a:latin typeface="Cambria Math"/>
+              </a:rPr>
+              <a:t>U</a:t>
+            </a:r>
+            <a:r>
+              <a:rPr sz="900"/>
+              <a:t>).</a:t>
             </a:r>
           </a:p>
           <a:p>
@@ -3511,17 +3537,7 @@
             </a:r>
             <a:r>
               <a:rPr sz="900"/>
-              <a:t>: assortative matching — peer environments concentrate; inverted-</a:t>
-            </a:r>
-            <a:r>
-              <a:rPr sz="900" i="1">
-                <a:latin typeface="Cambria Math"/>
-              </a:rPr>
-              <a:t>U</a:t>
-            </a:r>
-            <a:r>
-              <a:rPr sz="900"/>
-              <a:t> emerges.</a:t>
+              <a:t>: assortative matching — flat bottom bins, interior peak, top-bin dip.</a:t>
             </a:r>
           </a:p>
           <a:p>
@@ -3611,7 +3627,33 @@
             </a:r>
             <a:r>
               <a:rPr sz="1000"/>
-              <a:t>) rosters mix and peer pressure looks the same everywhere; at high </a:t>
+              <a:t>) rosters mix and </a:t>
+            </a:r>
+            <a:r>
+              <a:rPr sz="1000" i="1">
+                <a:latin typeface="Cambria Math"/>
+              </a:rPr>
+              <a:t>L</a:t>
+            </a:r>
+            <a:r>
+              <a:rPr sz="800" i="1" baseline="-25000">
+                <a:latin typeface="Cambria Math"/>
+              </a:rPr>
+              <a:t>C</a:t>
+            </a:r>
+            <a:r>
+              <a:rPr sz="1000"/>
+              <a:t> is nearly uniform; selection still tilts up pool-mean bins because global top-</a:t>
+            </a:r>
+            <a:r>
+              <a:rPr sz="1000" i="1">
+                <a:latin typeface="Cambria Math"/>
+              </a:rPr>
+              <a:t>K</a:t>
+            </a:r>
+            <a:r>
+              <a:rPr sz="1000"/>
+              <a:t> favors better players on stronger teams (see doc 08). At high </a:t>
             </a:r>
             <a:r>
               <a:rPr sz="1000" i="1">
@@ -3643,7 +3685,17 @@
             </a:r>
             <a:r>
               <a:rPr sz="1000"/>
-              <a:t> while elite rosters face real congestion.</a:t>
+              <a:t> while elite rosters face real congestion — the inverted-</a:t>
+            </a:r>
+            <a:r>
+              <a:rPr sz="1000" i="1">
+                <a:latin typeface="Cambria Math"/>
+              </a:rPr>
+              <a:t>U</a:t>
+            </a:r>
+            <a:r>
+              <a:rPr sz="1000"/>
+              <a:t> emerges.</a:t>
             </a:r>
           </a:p>
         </p:txBody>
@@ -3705,7 +3757,17 @@
             </a:r>
             <a:r>
               <a:rPr sz="1100"/>
-              <a:t> mixing yields a nearly flat curve; high-</a:t>
+              <a:t> mixing yields a weak monotone tilt (no inverted-</a:t>
+            </a:r>
+            <a:r>
+              <a:rPr sz="1100" i="1">
+                <a:latin typeface="Cambria Math"/>
+              </a:rPr>
+              <a:t>U</a:t>
+            </a:r>
+            <a:r>
+              <a:rPr sz="1100"/>
+              <a:t>); high-</a:t>
             </a:r>
             <a:r>
               <a:rPr sz="1100" i="1">
@@ -3862,7 +3924,7 @@
             </a:pPr>
             <a:r>
               <a:rPr sz="1000">
-                <a:latin typeface="Courier New"/>
+                <a:latin typeface="Calibri"/>
               </a:rPr>
               <a:t>\pi_{ij} \propto \exp\left(-\rho \cdot \frac{(A_i-T_{j^*})^2}{2\sigma^2}\right)</a:t>
             </a:r>
@@ -3898,7 +3960,7 @@
               <a:rPr sz="1000" i="1">
                 <a:latin typeface="Cambria Math"/>
               </a:rPr>
-              <a:t>ρ ∈ {0.1, 1, 8, 32}</a:t>
+              <a:t>ρ ∈ {0.001, 1, 8, 32}</a:t>
             </a:r>
           </a:p>
           <a:p>
@@ -4036,8 +4098,8 @@
         </p:blipFill>
         <p:spPr>
           <a:xfrm>
-            <a:off x="5658895" y="768096"/>
-            <a:ext cx="5235593" cy="3511296"/>
+            <a:off x="5603779" y="768096"/>
+            <a:ext cx="5345824" cy="3511296"/>
           </a:xfrm>
           <a:prstGeom prst="rect">
             <a:avLst/>
@@ -4142,7 +4204,33 @@
             </a:r>
             <a:r>
               <a:rPr sz="900"/>
-              <a:t>: players mix across teams — selection vs pool mean stays nearly flat.</a:t>
+              <a:t>: rosters mix — </a:t>
+            </a:r>
+            <a:r>
+              <a:rPr sz="900" i="1">
+                <a:latin typeface="Cambria Math"/>
+              </a:rPr>
+              <a:t>L</a:t>
+            </a:r>
+            <a:r>
+              <a:rPr sz="800" i="1" baseline="-25000">
+                <a:latin typeface="Cambria Math"/>
+              </a:rPr>
+              <a:t>C</a:t>
+            </a:r>
+            <a:r>
+              <a:rPr sz="900"/>
+              <a:t> nearly uniform; curve tilts up weakly (no inverted-</a:t>
+            </a:r>
+            <a:r>
+              <a:rPr sz="900" i="1">
+                <a:latin typeface="Cambria Math"/>
+              </a:rPr>
+              <a:t>U</a:t>
+            </a:r>
+            <a:r>
+              <a:rPr sz="900"/>
+              <a:t>).</a:t>
             </a:r>
           </a:p>
           <a:p>
@@ -4166,17 +4254,7 @@
             </a:r>
             <a:r>
               <a:rPr sz="900"/>
-              <a:t>: assortative matching — peer environments concentrate; inverted-</a:t>
-            </a:r>
-            <a:r>
-              <a:rPr sz="900" i="1">
-                <a:latin typeface="Cambria Math"/>
-              </a:rPr>
-              <a:t>U</a:t>
-            </a:r>
-            <a:r>
-              <a:rPr sz="900"/>
-              <a:t> emerges.</a:t>
+              <a:t>: assortative matching — flat bottom bins, interior peak, top-bin dip.</a:t>
             </a:r>
           </a:p>
           <a:p>
@@ -4266,7 +4344,33 @@
             </a:r>
             <a:r>
               <a:rPr sz="1000"/>
-              <a:t>) rosters mix and peer pressure looks the same everywhere; at high </a:t>
+              <a:t>) rosters mix and </a:t>
+            </a:r>
+            <a:r>
+              <a:rPr sz="1000" i="1">
+                <a:latin typeface="Cambria Math"/>
+              </a:rPr>
+              <a:t>L</a:t>
+            </a:r>
+            <a:r>
+              <a:rPr sz="800" i="1" baseline="-25000">
+                <a:latin typeface="Cambria Math"/>
+              </a:rPr>
+              <a:t>C</a:t>
+            </a:r>
+            <a:r>
+              <a:rPr sz="1000"/>
+              <a:t> is nearly uniform; selection still tilts up pool-mean bins because global top-</a:t>
+            </a:r>
+            <a:r>
+              <a:rPr sz="1000" i="1">
+                <a:latin typeface="Cambria Math"/>
+              </a:rPr>
+              <a:t>K</a:t>
+            </a:r>
+            <a:r>
+              <a:rPr sz="1000"/>
+              <a:t> favors better players on stronger teams (see doc 08). At high </a:t>
             </a:r>
             <a:r>
               <a:rPr sz="1000" i="1">
@@ -4298,7 +4402,17 @@
             </a:r>
             <a:r>
               <a:rPr sz="1000"/>
-              <a:t> while elite rosters face real congestion.</a:t>
+              <a:t> while elite rosters face real congestion — the inverted-</a:t>
+            </a:r>
+            <a:r>
+              <a:rPr sz="1000" i="1">
+                <a:latin typeface="Cambria Math"/>
+              </a:rPr>
+              <a:t>U</a:t>
+            </a:r>
+            <a:r>
+              <a:rPr sz="1000"/>
+              <a:t> emerges.</a:t>
             </a:r>
           </a:p>
         </p:txBody>
@@ -4360,7 +4474,17 @@
             </a:r>
             <a:r>
               <a:rPr sz="1100"/>
-              <a:t> mixing yields a nearly flat curve; high-</a:t>
+              <a:t> mixing yields a weak monotone tilt (no inverted-</a:t>
+            </a:r>
+            <a:r>
+              <a:rPr sz="1100" i="1">
+                <a:latin typeface="Cambria Math"/>
+              </a:rPr>
+              <a:t>U</a:t>
+            </a:r>
+            <a:r>
+              <a:rPr sz="1100"/>
+              <a:t>); high-</a:t>
             </a:r>
             <a:r>
               <a:rPr sz="1100" i="1">
